--- a/deck-v1.1.pptx
+++ b/deck-v1.1.pptx
@@ -2215,7 +2215,7 @@
         </p:nvSpPr>
         <p:spPr>
           <a:xfrm>
-            <a:off x="431800" y="457200"/>
+            <a:off x="336430" y="0"/>
             <a:ext cx="8229600" cy="731520"/>
           </a:xfrm>
           <a:prstGeom prst="rect">
@@ -2251,7 +2251,7 @@
         </p:nvSpPr>
         <p:spPr>
           <a:xfrm>
-            <a:off x="402465" y="1371600"/>
+            <a:off x="336430" y="731520"/>
             <a:ext cx="3886200" cy="457200"/>
           </a:xfrm>
           <a:prstGeom prst="rect">
@@ -2268,11 +2268,7 @@
               <a:buNone/>
             </a:pPr>
             <a:r>
-              <a:rPr lang="en-US" sz="1800" b="1" dirty="0">
-                <a:solidFill>
-                  <a:srgbClr val="EF4444"/>
-                </a:solidFill>
-              </a:rPr>
+              <a:rPr lang="en-US" sz="1800" b="1" dirty="0"/>
               <a:t>Identified Weaknesses</a:t>
             </a:r>
             <a:endParaRPr lang="en-US" sz="1800" dirty="0"/>
@@ -2287,8 +2283,8 @@
         </p:nvSpPr>
         <p:spPr>
           <a:xfrm>
-            <a:off x="402465" y="1828799"/>
-            <a:ext cx="4343400" cy="2497873"/>
+            <a:off x="194762" y="1413886"/>
+            <a:ext cx="3644325" cy="3071005"/>
           </a:xfrm>
           <a:prstGeom prst="rect">
             <a:avLst/>
@@ -2332,6 +2328,17 @@
               <a:rPr lang="en" altLang="zh-CN" sz="1400" dirty="0"/>
               <a:t>The reward function logic remains fixed throughout the training and back-testing periods, ignoring the fact that market regimes and risk appetites change over time.</a:t>
             </a:r>
+          </a:p>
+          <a:p>
+            <a:pPr marL="285750" indent="-285750">
+              <a:buSzPct val="100000"/>
+              <a:buFont typeface="Arial" panose="020B0604020202020204" pitchFamily="34" charset="0"/>
+              <a:buChar char="•"/>
+            </a:pPr>
+            <a:r>
+              <a:rPr lang="en" altLang="zh-CN" sz="1400" dirty="0"/>
+              <a:t>Baseline momentum algorithms suffer from deteriorating predictability and excess turnover during market consolidation.</a:t>
+            </a:r>
             <a:endParaRPr lang="en-US" sz="1400" dirty="0"/>
           </a:p>
         </p:txBody>
@@ -2344,7 +2351,7 @@
         </p:nvSpPr>
         <p:spPr>
           <a:xfrm>
-            <a:off x="5148329" y="1371600"/>
+            <a:off x="3959857" y="550010"/>
             <a:ext cx="3886200" cy="457200"/>
           </a:xfrm>
           <a:prstGeom prst="rect">
@@ -2361,11 +2368,7 @@
               <a:buNone/>
             </a:pPr>
             <a:r>
-              <a:rPr lang="en-US" sz="1800" b="1" dirty="0">
-                <a:solidFill>
-                  <a:srgbClr val="10B981"/>
-                </a:solidFill>
-              </a:rPr>
+              <a:rPr lang="en-US" sz="1800" b="1" dirty="0"/>
               <a:t>Tentative Timeline</a:t>
             </a:r>
             <a:endParaRPr lang="en-US" sz="1800" dirty="0"/>
@@ -2380,8 +2383,8 @@
         </p:nvSpPr>
         <p:spPr>
           <a:xfrm>
-            <a:off x="5148329" y="1828799"/>
-            <a:ext cx="3886200" cy="1828800"/>
+            <a:off x="4009874" y="445661"/>
+            <a:ext cx="4174021" cy="1828800"/>
           </a:xfrm>
           <a:prstGeom prst="rect">
             <a:avLst/>
@@ -2433,8 +2436,192 @@
                   <a:srgbClr val="1C1917"/>
                 </a:solidFill>
               </a:rPr>
-              <a:t>Months 5-6: Distributional RL &amp; Portfolio Optimization.</a:t>
-            </a:r>
+              <a:t>Months 5-</a:t>
+            </a:r>
+            <a:r>
+              <a:rPr lang="en-US" altLang="zh-CN" sz="1400" dirty="0">
+                <a:solidFill>
+                  <a:srgbClr val="1C1917"/>
+                </a:solidFill>
+              </a:rPr>
+              <a:t>7</a:t>
+            </a:r>
+            <a:r>
+              <a:rPr lang="en-US" sz="1400" dirty="0">
+                <a:solidFill>
+                  <a:srgbClr val="1C1917"/>
+                </a:solidFill>
+              </a:rPr>
+              <a:t>: Back test &amp; Execution &amp; </a:t>
+            </a:r>
+            <a:r>
+              <a:rPr lang="en-US" sz="1400" dirty="0" err="1">
+                <a:solidFill>
+                  <a:srgbClr val="1C1917"/>
+                </a:solidFill>
+              </a:rPr>
+              <a:t>Extention</a:t>
+            </a:r>
+            <a:endParaRPr lang="en-US" sz="1400" dirty="0">
+              <a:solidFill>
+                <a:srgbClr val="1C1917"/>
+              </a:solidFill>
+            </a:endParaRPr>
+          </a:p>
+          <a:p>
+            <a:pPr marL="342900" indent="-342900">
+              <a:buSzPct val="100000"/>
+              <a:buChar char="•"/>
+            </a:pPr>
+            <a:r>
+              <a:rPr lang="en-US" sz="1400" dirty="0">
+                <a:solidFill>
+                  <a:srgbClr val="1C1917"/>
+                </a:solidFill>
+              </a:rPr>
+              <a:t>Months</a:t>
+            </a:r>
+            <a:r>
+              <a:rPr lang="zh-CN" altLang="en-US" sz="1400" dirty="0">
+                <a:solidFill>
+                  <a:srgbClr val="1C1917"/>
+                </a:solidFill>
+              </a:rPr>
+              <a:t> </a:t>
+            </a:r>
+            <a:r>
+              <a:rPr lang="en-US" altLang="zh-CN" sz="1400" dirty="0">
+                <a:solidFill>
+                  <a:srgbClr val="1C1917"/>
+                </a:solidFill>
+              </a:rPr>
+              <a:t>7-8:</a:t>
+            </a:r>
+            <a:r>
+              <a:rPr lang="zh-CN" altLang="en-US" sz="1400" dirty="0">
+                <a:solidFill>
+                  <a:srgbClr val="1C1917"/>
+                </a:solidFill>
+              </a:rPr>
+              <a:t> </a:t>
+            </a:r>
+            <a:r>
+              <a:rPr lang="en-US" altLang="zh-CN" sz="1400" dirty="0">
+                <a:solidFill>
+                  <a:srgbClr val="1C1917"/>
+                </a:solidFill>
+              </a:rPr>
+              <a:t>Evaluation &amp; Final Deck</a:t>
+            </a:r>
+            <a:endParaRPr lang="en-US" sz="1400" dirty="0"/>
+          </a:p>
+        </p:txBody>
+      </p:sp>
+      <p:sp>
+        <p:nvSpPr>
+          <p:cNvPr id="8" name="文本框 7">
+            <a:extLst>
+              <a:ext uri="{FF2B5EF4-FFF2-40B4-BE49-F238E27FC236}">
+                <a16:creationId xmlns:a16="http://schemas.microsoft.com/office/drawing/2014/main" id="{81B34C44-E29C-70D8-1A12-C1D8EE190E9E}"/>
+              </a:ext>
+            </a:extLst>
+          </p:cNvPr>
+          <p:cNvSpPr txBox="1"/>
+          <p:nvPr/>
+        </p:nvSpPr>
+        <p:spPr>
+          <a:xfrm>
+            <a:off x="3959857" y="1799960"/>
+            <a:ext cx="4572000" cy="369332"/>
+          </a:xfrm>
+          <a:prstGeom prst="rect">
+            <a:avLst/>
+          </a:prstGeom>
+          <a:noFill/>
+        </p:spPr>
+        <p:txBody>
+          <a:bodyPr wrap="square">
+            <a:spAutoFit/>
+          </a:bodyPr>
+          <a:lstStyle/>
+          <a:p>
+            <a:r>
+              <a:rPr lang="en" altLang="zh-CN" b="1" dirty="0"/>
+              <a:t>Planned Extension</a:t>
+            </a:r>
+            <a:endParaRPr lang="en-US" altLang="zh-CN" sz="1800" b="1" dirty="0"/>
+          </a:p>
+        </p:txBody>
+      </p:sp>
+      <p:sp>
+        <p:nvSpPr>
+          <p:cNvPr id="9" name="Text 4">
+            <a:extLst>
+              <a:ext uri="{FF2B5EF4-FFF2-40B4-BE49-F238E27FC236}">
+                <a16:creationId xmlns:a16="http://schemas.microsoft.com/office/drawing/2014/main" id="{319982FA-EC2A-067D-DCD8-345A140C614A}"/>
+              </a:ext>
+            </a:extLst>
+          </p:cNvPr>
+          <p:cNvSpPr/>
+          <p:nvPr/>
+        </p:nvSpPr>
+        <p:spPr>
+          <a:xfrm>
+            <a:off x="4009874" y="2433455"/>
+            <a:ext cx="4975628" cy="2317580"/>
+          </a:xfrm>
+          <a:prstGeom prst="rect">
+            <a:avLst/>
+          </a:prstGeom>
+          <a:noFill/>
+          <a:ln/>
+        </p:spPr>
+        <p:txBody>
+          <a:bodyPr wrap="square" rtlCol="0" anchor="ctr"/>
+          <a:lstStyle/>
+          <a:p>
+            <a:r>
+              <a:rPr lang="en" altLang="zh-CN" sz="1300" b="1" dirty="0"/>
+              <a:t>From “Independent Assets” to “Portfolio Optimization”:</a:t>
+            </a:r>
+            <a:br>
+              <a:rPr lang="en" altLang="zh-CN" sz="1300" dirty="0"/>
+            </a:br>
+            <a:r>
+              <a:rPr lang="en" altLang="zh-CN" sz="1300" dirty="0"/>
+              <a:t>Instead of treating each contract independently, we apply Hierarchical Risk Parity (HRP) or RL-based portfolio optimization for cross-asset hedging. This improves diversification and increases the portfolio Sharpe ratio.</a:t>
+            </a:r>
+          </a:p>
+          <a:p>
+            <a:r>
+              <a:rPr lang="en" altLang="zh-CN" sz="1300" b="1" dirty="0"/>
+              <a:t>Regime-aware Reward Function:</a:t>
+            </a:r>
+            <a:br>
+              <a:rPr lang="en" altLang="zh-CN" sz="1300" dirty="0"/>
+            </a:br>
+            <a:r>
+              <a:rPr lang="en" altLang="zh-CN" sz="1300" dirty="0"/>
+              <a:t>We use a Hidden Markov Model (HMM) to detect market regimes (bull, bear, or sideways) and adjust the reward function dynamically. This balances return and risk across different market conditions.</a:t>
+            </a:r>
+          </a:p>
+          <a:p>
+            <a:r>
+              <a:rPr lang="en" altLang="zh-CN" sz="1300" b="1" dirty="0"/>
+              <a:t>Shift the utility function:</a:t>
+            </a:r>
+          </a:p>
+          <a:p>
+            <a:r>
+              <a:rPr lang="en" altLang="zh-CN" sz="1300" dirty="0"/>
+              <a:t>Using risk-adjusted metric like the Sharpe Ratio (concave utility for risk-averse behavior) as utility function instead of maximizing simple linear returns</a:t>
+            </a:r>
+          </a:p>
+          <a:p>
+            <a:pPr marL="342900" indent="-342900">
+              <a:buSzPct val="100000"/>
+              <a:buChar char="•"/>
+            </a:pPr>
             <a:endParaRPr lang="en-US" sz="1400" dirty="0"/>
           </a:p>
         </p:txBody>
